--- a/msds_ppt_generator/templates/label_template.pptx
+++ b/msds_ppt_generator/templates/label_template.pptx
@@ -778,8 +778,8 @@
           <p:nvPr/>
         </p:nvGraphicFramePr>
         <p:xfrm>
-          <a:off x="260280" y="4067320"/>
-          <a:ext cx="6337440" cy="3978720"/>
+          <a:off x="260280" y="1300000"/>
+          <a:ext cx="6337440" cy="6400000"/>
         </p:xfrm>
         <a:graphic>
           <a:graphicData uri="http://schemas.openxmlformats.org/drawingml/2006/table">
@@ -789,7 +789,7 @@
                 <a:gridCol w="1224000"/>
                 <a:gridCol w="5113440"/>
               </a:tblGrid>
-              <a:tr h="1242000">
+              <a:tr h="1450000">
                 <a:tc>
                   <a:txBody>
                     <a:bodyPr lIns="90000" rIns="90000" tIns="46800" bIns="46800" anchor="ctr">
@@ -819,13 +819,13 @@
                         </a:tabLst>
                       </a:pPr>
                       <a:r>
-                        <a:rPr b="1" lang="ko-KR" sz="1400" spc="-1" strike="noStrike">
+                        <a:rPr b="1" lang="ko-KR" sz="3600" spc="-1" strike="noStrike">
                           <a:solidFill>
                             <a:srgbClr val="000000"/>
                           </a:solidFill>
-                          <a:latin typeface="굴림"/>
-                        </a:rPr>
-                        <a:t>유해ㆍ위험 </a:t>
+                          <a:latin typeface="HY헤드라인M"/>
+                        </a:rPr>
+                        <a:t>위험</a:t>
                       </a:r>
                       <a:endParaRPr b="0" lang="en-US" sz="1400" spc="-1" strike="noStrike">
                         <a:solidFill>
@@ -834,6 +834,84 @@
                         <a:latin typeface="굴림"/>
                       </a:endParaRPr>
                     </a:p>
+                  </a:txBody>
+                  <a:tcPr anchor="ctr" marL="90000" marR="90000">
+                    <a:lnL w="2880">
+                      <a:solidFill>
+                        <a:srgbClr val="000000"/>
+                      </a:solidFill>
+                      <a:prstDash val="solid"/>
+                    </a:lnL>
+                    <a:lnR w="5760">
+                      <a:solidFill>
+                        <a:srgbClr val="000000"/>
+                      </a:solidFill>
+                      <a:prstDash val="solid"/>
+                    </a:lnR>
+                    <a:lnT w="2880">
+                      <a:solidFill>
+                        <a:srgbClr val="000000"/>
+                      </a:solidFill>
+                      <a:prstDash val="solid"/>
+                    </a:lnT>
+                    <a:lnB w="5760">
+                      <a:solidFill>
+                        <a:srgbClr val="000000"/>
+                      </a:solidFill>
+                      <a:prstDash val="solid"/>
+                    </a:lnB>
+                    <a:noFill/>
+                  </a:tcPr>
+                </a:tc>
+                <a:tc>
+                  <a:txBody>
+                    <a:bodyPr lIns="90000" rIns="90000" tIns="46800" bIns="46800" anchor="t">
+                      <a:noAutofit/>
+                    </a:bodyPr>
+                    <a:p>
+                      <a:r>
+                        <a:rPr sz="1300" b="1">
+                          <a:latin typeface="굴림"/>
+                        </a:rPr>
+                        <a:t/>
+                      </a:r>
+                    </a:p>
+                  </a:txBody>
+                  <a:tcPr anchor="t" marL="90000" marR="90000">
+                    <a:lnL w="5760">
+                      <a:solidFill>
+                        <a:srgbClr val="000000"/>
+                      </a:solidFill>
+                      <a:prstDash val="solid"/>
+                    </a:lnL>
+                    <a:lnR w="2880">
+                      <a:solidFill>
+                        <a:srgbClr val="000000"/>
+                      </a:solidFill>
+                      <a:prstDash val="solid"/>
+                    </a:lnR>
+                    <a:lnT w="2880">
+                      <a:solidFill>
+                        <a:srgbClr val="000000"/>
+                      </a:solidFill>
+                      <a:prstDash val="solid"/>
+                    </a:lnT>
+                    <a:lnB w="5760">
+                      <a:solidFill>
+                        <a:srgbClr val="000000"/>
+                      </a:solidFill>
+                      <a:prstDash val="solid"/>
+                    </a:lnB>
+                    <a:noFill/>
+                  </a:tcPr>
+                </a:tc>
+              </a:tr>
+              <a:tr h="1350000">
+                <a:tc>
+                  <a:txBody>
+                    <a:bodyPr lIns="90000" rIns="90000" tIns="46800" bIns="46800" anchor="ctr">
+                      <a:noAutofit/>
+                    </a:bodyPr>
                     <a:p>
                       <a:pPr algn="ctr">
                         <a:lnSpc>
@@ -864,7 +942,7 @@
                           </a:solidFill>
                           <a:latin typeface="굴림"/>
                         </a:rPr>
-                        <a:t>문구</a:t>
+                        <a:t>유해ㆍ위험 </a:t>
                       </a:r>
                       <a:endParaRPr b="0" lang="en-US" sz="1400" spc="-1" strike="noStrike">
                         <a:solidFill>
@@ -873,116 +951,6 @@
                         <a:latin typeface="굴림"/>
                       </a:endParaRPr>
                     </a:p>
-                  </a:txBody>
-                  <a:tcPr anchor="ctr" marL="90000" marR="90000">
-                    <a:lnL w="2880">
-                      <a:solidFill>
-                        <a:srgbClr val="000000"/>
-                      </a:solidFill>
-                      <a:prstDash val="solid"/>
-                    </a:lnL>
-                    <a:lnR w="5760">
-                      <a:solidFill>
-                        <a:srgbClr val="000000"/>
-                      </a:solidFill>
-                      <a:prstDash val="solid"/>
-                    </a:lnR>
-                    <a:lnT w="2880">
-                      <a:solidFill>
-                        <a:srgbClr val="000000"/>
-                      </a:solidFill>
-                      <a:prstDash val="solid"/>
-                    </a:lnT>
-                    <a:lnB w="5760">
-                      <a:solidFill>
-                        <a:srgbClr val="000000"/>
-                      </a:solidFill>
-                      <a:prstDash val="solid"/>
-                    </a:lnB>
-                    <a:noFill/>
-                  </a:tcPr>
-                </a:tc>
-                <a:tc>
-                  <a:txBody>
-                    <a:bodyPr lIns="90000" rIns="90000" tIns="46800" bIns="46800" anchor="t">
-                      <a:noAutofit/>
-                    </a:bodyPr>
-                    <a:p>
-                      <a:r>
-                        <a:rPr sz="1300" b="1">
-                          <a:latin typeface="굴림"/>
-                        </a:rPr>
-                        <a:t>▪ 알레르기성 피부 반응을 일으킬 수 있음(H317)</a:t>
-                      </a:r>
-                    </a:p>
-                    <a:p>
-                      <a:r>
-                        <a:rPr sz="1300" b="1">
-                          <a:latin typeface="굴림"/>
-                        </a:rPr>
-                        <a:t>▪ 눈에 심한 자극을 일으킴(H319)</a:t>
-                      </a:r>
-                    </a:p>
-                    <a:p>
-                      <a:r>
-                        <a:rPr sz="1300" b="1">
-                          <a:latin typeface="굴림"/>
-                        </a:rPr>
-                        <a:t>▪ 암을 일으킬 것으로 의심됨(H351)</a:t>
-                      </a:r>
-                    </a:p>
-                    <a:p>
-                      <a:r>
-                        <a:rPr sz="1300" b="1">
-                          <a:latin typeface="굴림"/>
-                        </a:rPr>
-                        <a:t>▪ 장기간 또는 반복노출 되면 장기(호흡기, 폐)에 손상을 일으킴(H372)</a:t>
-                      </a:r>
-                    </a:p>
-                    <a:p>
-                      <a:r>
-                        <a:rPr sz="1300" b="1">
-                          <a:latin typeface="굴림"/>
-                        </a:rPr>
-                        <a:t>▪ 수생생물에 매우 유독함(H400)</a:t>
-                      </a:r>
-                    </a:p>
-                  </a:txBody>
-                  <a:tcPr anchor="t" marL="90000" marR="90000">
-                    <a:lnL w="5760">
-                      <a:solidFill>
-                        <a:srgbClr val="000000"/>
-                      </a:solidFill>
-                      <a:prstDash val="solid"/>
-                    </a:lnL>
-                    <a:lnR w="2880">
-                      <a:solidFill>
-                        <a:srgbClr val="000000"/>
-                      </a:solidFill>
-                      <a:prstDash val="solid"/>
-                    </a:lnR>
-                    <a:lnT w="2880">
-                      <a:solidFill>
-                        <a:srgbClr val="000000"/>
-                      </a:solidFill>
-                      <a:prstDash val="solid"/>
-                    </a:lnT>
-                    <a:lnB w="5760">
-                      <a:solidFill>
-                        <a:srgbClr val="000000"/>
-                      </a:solidFill>
-                      <a:prstDash val="solid"/>
-                    </a:lnB>
-                    <a:noFill/>
-                  </a:tcPr>
-                </a:tc>
-              </a:tr>
-              <a:tr h="2736720">
-                <a:tc>
-                  <a:txBody>
-                    <a:bodyPr lIns="90000" rIns="90000" tIns="46800" bIns="46800" anchor="ctr">
-                      <a:noAutofit/>
-                    </a:bodyPr>
                     <a:p>
                       <a:pPr algn="ctr">
                         <a:lnSpc>
@@ -1013,7 +981,7 @@
                           </a:solidFill>
                           <a:latin typeface="굴림"/>
                         </a:rPr>
-                        <a:t>예방조치</a:t>
+                        <a:t>문구</a:t>
                       </a:r>
                       <a:endParaRPr b="0" lang="en-US" sz="1400" spc="-1" strike="noStrike">
                         <a:solidFill>
@@ -1022,6 +990,116 @@
                         <a:latin typeface="굴림"/>
                       </a:endParaRPr>
                     </a:p>
+                  </a:txBody>
+                  <a:tcPr anchor="ctr" marL="90000" marR="90000">
+                    <a:lnL w="2880">
+                      <a:solidFill>
+                        <a:srgbClr val="000000"/>
+                      </a:solidFill>
+                      <a:prstDash val="solid"/>
+                    </a:lnL>
+                    <a:lnR w="5760">
+                      <a:solidFill>
+                        <a:srgbClr val="000000"/>
+                      </a:solidFill>
+                      <a:prstDash val="solid"/>
+                    </a:lnR>
+                    <a:lnT w="2880">
+                      <a:solidFill>
+                        <a:srgbClr val="000000"/>
+                      </a:solidFill>
+                      <a:prstDash val="solid"/>
+                    </a:lnT>
+                    <a:lnB w="5760">
+                      <a:solidFill>
+                        <a:srgbClr val="000000"/>
+                      </a:solidFill>
+                      <a:prstDash val="solid"/>
+                    </a:lnB>
+                    <a:noFill/>
+                  </a:tcPr>
+                </a:tc>
+                <a:tc>
+                  <a:txBody>
+                    <a:bodyPr lIns="90000" rIns="90000" tIns="46800" bIns="46800" anchor="t">
+                      <a:noAutofit/>
+                    </a:bodyPr>
+                    <a:p>
+                      <a:r>
+                        <a:rPr sz="1300" b="1">
+                          <a:latin typeface="굴림"/>
+                        </a:rPr>
+                        <a:t>▪ 알레르기성 피부 반응을 일으킬 수 있음(H317)</a:t>
+                      </a:r>
+                    </a:p>
+                    <a:p>
+                      <a:r>
+                        <a:rPr sz="1300" b="1">
+                          <a:latin typeface="굴림"/>
+                        </a:rPr>
+                        <a:t>▪ 눈에 심한 자극을 일으킴(H319)</a:t>
+                      </a:r>
+                    </a:p>
+                    <a:p>
+                      <a:r>
+                        <a:rPr sz="1300" b="1">
+                          <a:latin typeface="굴림"/>
+                        </a:rPr>
+                        <a:t>▪ 암을 일으킬 것으로 의심됨(H351)</a:t>
+                      </a:r>
+                    </a:p>
+                    <a:p>
+                      <a:r>
+                        <a:rPr sz="1300" b="1">
+                          <a:latin typeface="굴림"/>
+                        </a:rPr>
+                        <a:t>▪ 장기간 또는 반복노출 되면 장기(호흡기, 폐)에 손상을 일으킴(H372)</a:t>
+                      </a:r>
+                    </a:p>
+                    <a:p>
+                      <a:r>
+                        <a:rPr sz="1300" b="1">
+                          <a:latin typeface="굴림"/>
+                        </a:rPr>
+                        <a:t>▪ 수생생물에 매우 유독함(H400)</a:t>
+                      </a:r>
+                    </a:p>
+                  </a:txBody>
+                  <a:tcPr anchor="t" marL="90000" marR="90000">
+                    <a:lnL w="5760">
+                      <a:solidFill>
+                        <a:srgbClr val="000000"/>
+                      </a:solidFill>
+                      <a:prstDash val="solid"/>
+                    </a:lnL>
+                    <a:lnR w="2880">
+                      <a:solidFill>
+                        <a:srgbClr val="000000"/>
+                      </a:solidFill>
+                      <a:prstDash val="solid"/>
+                    </a:lnR>
+                    <a:lnT w="2880">
+                      <a:solidFill>
+                        <a:srgbClr val="000000"/>
+                      </a:solidFill>
+                      <a:prstDash val="solid"/>
+                    </a:lnT>
+                    <a:lnB w="5760">
+                      <a:solidFill>
+                        <a:srgbClr val="000000"/>
+                      </a:solidFill>
+                      <a:prstDash val="solid"/>
+                    </a:lnB>
+                    <a:noFill/>
+                  </a:tcPr>
+                </a:tc>
+              </a:tr>
+              <a:tr h="2600000">
+                <a:tc>
+                  <a:txBody>
+                    <a:bodyPr lIns="90000" rIns="90000" tIns="46800" bIns="46800" anchor="ctr">
+                      <a:noAutofit/>
+                    </a:bodyPr>
                     <a:p>
                       <a:pPr algn="ctr">
                         <a:lnSpc>
@@ -1052,6 +1130,45 @@
                           </a:solidFill>
                           <a:latin typeface="굴림"/>
                         </a:rPr>
+                        <a:t>예방조치</a:t>
+                      </a:r>
+                      <a:endParaRPr b="0" lang="en-US" sz="1400" spc="-1" strike="noStrike">
+                        <a:solidFill>
+                          <a:srgbClr val="000000"/>
+                        </a:solidFill>
+                        <a:latin typeface="굴림"/>
+                      </a:endParaRPr>
+                    </a:p>
+                    <a:p>
+                      <a:pPr algn="ctr">
+                        <a:lnSpc>
+                          <a:spcPts val="1998"/>
+                        </a:lnSpc>
+                        <a:spcBef>
+                          <a:spcPts val="349"/>
+                        </a:spcBef>
+                        <a:tabLst>
+                          <a:tab algn="l" pos="0"/>
+                          <a:tab algn="l" pos="914400"/>
+                          <a:tab algn="l" pos="1828800"/>
+                          <a:tab algn="l" pos="2743200"/>
+                          <a:tab algn="l" pos="3657600"/>
+                          <a:tab algn="l" pos="4572000"/>
+                          <a:tab algn="l" pos="5486400"/>
+                          <a:tab algn="l" pos="6400800"/>
+                          <a:tab algn="l" pos="7315200"/>
+                          <a:tab algn="l" pos="8229600"/>
+                          <a:tab algn="l" pos="9144000"/>
+                          <a:tab algn="l" pos="10058400"/>
+                        </a:tabLst>
+                      </a:pPr>
+                      <a:r>
+                        <a:rPr b="1" lang="ko-KR" sz="1400" spc="-1" strike="noStrike">
+                          <a:solidFill>
+                            <a:srgbClr val="000000"/>
+                          </a:solidFill>
+                          <a:latin typeface="굴림"/>
+                        </a:rPr>
                         <a:t> </a:t>
                       </a:r>
                       <a:r>
@@ -1158,6 +1275,178 @@
                           <a:latin typeface="굴림"/>
                         </a:rPr>
                         <a:t>▪ 잠금장치를 하여 저장하고, 폐기물 관련 법령에 따라 폐기하시오</a:t>
+                      </a:r>
+                    </a:p>
+                  </a:txBody>
+                  <a:tcPr anchor="t" marL="90000" marR="90000">
+                    <a:lnL w="5760">
+                      <a:solidFill>
+                        <a:srgbClr val="000000"/>
+                      </a:solidFill>
+                      <a:prstDash val="solid"/>
+                    </a:lnL>
+                    <a:lnR w="2880">
+                      <a:solidFill>
+                        <a:srgbClr val="000000"/>
+                      </a:solidFill>
+                      <a:prstDash val="solid"/>
+                    </a:lnR>
+                    <a:lnT w="5760">
+                      <a:solidFill>
+                        <a:srgbClr val="000000"/>
+                      </a:solidFill>
+                      <a:prstDash val="solid"/>
+                    </a:lnT>
+                    <a:lnB w="2880">
+                      <a:solidFill>
+                        <a:srgbClr val="000000"/>
+                      </a:solidFill>
+                      <a:prstDash val="solid"/>
+                    </a:lnB>
+                    <a:noFill/>
+                  </a:tcPr>
+                </a:tc>
+              </a:tr>
+              <a:tr h="1000000">
+                <a:tc>
+                  <a:txBody>
+                    <a:bodyPr lIns="90000" rIns="90000" tIns="46800" bIns="46800" anchor="ctr">
+                      <a:noAutofit/>
+                    </a:bodyPr>
+                    <a:p>
+                      <a:pPr algn="ctr">
+                        <a:lnSpc>
+                          <a:spcPts val="1998"/>
+                        </a:lnSpc>
+                        <a:spcBef>
+                          <a:spcPts val="349"/>
+                        </a:spcBef>
+                        <a:tabLst>
+                          <a:tab algn="l" pos="0"/>
+                          <a:tab algn="l" pos="914400"/>
+                          <a:tab algn="l" pos="1828800"/>
+                          <a:tab algn="l" pos="2743200"/>
+                          <a:tab algn="l" pos="3657600"/>
+                          <a:tab algn="l" pos="4572000"/>
+                          <a:tab algn="l" pos="5486400"/>
+                          <a:tab algn="l" pos="6400800"/>
+                          <a:tab algn="l" pos="7315200"/>
+                          <a:tab algn="l" pos="8229600"/>
+                          <a:tab algn="l" pos="9144000"/>
+                          <a:tab algn="l" pos="10058400"/>
+                        </a:tabLst>
+                      </a:pPr>
+                      <a:r>
+                        <a:rPr b="1" lang="ko-KR" sz="1400" spc="-1" strike="noStrike">
+                          <a:solidFill>
+                            <a:srgbClr val="000000"/>
+                          </a:solidFill>
+                          <a:latin typeface="굴림"/>
+                        </a:rPr>
+                        <a:t>공급자</a:t>
+                      </a:r>
+                      <a:endParaRPr b="0" lang="en-US" sz="1400" spc="-1" strike="noStrike">
+                        <a:solidFill>
+                          <a:srgbClr val="000000"/>
+                        </a:solidFill>
+                        <a:latin typeface="굴림"/>
+                      </a:endParaRPr>
+                    </a:p>
+                    <a:p>
+                      <a:pPr algn="ctr">
+                        <a:lnSpc>
+                          <a:spcPts val="1998"/>
+                        </a:lnSpc>
+                        <a:spcBef>
+                          <a:spcPts val="349"/>
+                        </a:spcBef>
+                        <a:tabLst>
+                          <a:tab algn="l" pos="0"/>
+                          <a:tab algn="l" pos="914400"/>
+                          <a:tab algn="l" pos="1828800"/>
+                          <a:tab algn="l" pos="2743200"/>
+                          <a:tab algn="l" pos="3657600"/>
+                          <a:tab algn="l" pos="4572000"/>
+                          <a:tab algn="l" pos="5486400"/>
+                          <a:tab algn="l" pos="6400800"/>
+                          <a:tab algn="l" pos="7315200"/>
+                          <a:tab algn="l" pos="8229600"/>
+                          <a:tab algn="l" pos="9144000"/>
+                          <a:tab algn="l" pos="10058400"/>
+                        </a:tabLst>
+                      </a:pPr>
+                      <a:r>
+                        <a:rPr b="1" lang="ko-KR" sz="1400" spc="-1" strike="noStrike">
+                          <a:solidFill>
+                            <a:srgbClr val="000000"/>
+                          </a:solidFill>
+                          <a:latin typeface="굴림"/>
+                        </a:rPr>
+                        <a:t>정보</a:t>
+                      </a:r>
+                      <a:endParaRPr b="0" lang="en-US" sz="1400" spc="-1" strike="noStrike">
+                        <a:solidFill>
+                          <a:srgbClr val="000000"/>
+                        </a:solidFill>
+                        <a:latin typeface="굴림"/>
+                      </a:endParaRPr>
+                    </a:p>
+                  </a:txBody>
+                  <a:tcPr anchor="ctr" marL="90000" marR="90000">
+                    <a:lnL w="2880">
+                      <a:solidFill>
+                        <a:srgbClr val="000000"/>
+                      </a:solidFill>
+                      <a:prstDash val="solid"/>
+                    </a:lnL>
+                    <a:lnR w="5760">
+                      <a:solidFill>
+                        <a:srgbClr val="000000"/>
+                      </a:solidFill>
+                      <a:prstDash val="solid"/>
+                    </a:lnR>
+                    <a:lnT w="5760">
+                      <a:solidFill>
+                        <a:srgbClr val="000000"/>
+                      </a:solidFill>
+                      <a:prstDash val="solid"/>
+                    </a:lnT>
+                    <a:lnB w="2880">
+                      <a:solidFill>
+                        <a:srgbClr val="000000"/>
+                      </a:solidFill>
+                      <a:prstDash val="solid"/>
+                    </a:lnB>
+                    <a:noFill/>
+                  </a:tcPr>
+                </a:tc>
+                <a:tc>
+                  <a:txBody>
+                    <a:bodyPr lIns="90000" rIns="90000" tIns="46800" bIns="46800" anchor="t">
+                      <a:noAutofit/>
+                    </a:bodyPr>
+                    <a:p>
+                      <a:r>
+                        <a:rPr sz="1300" b="1">
+                          <a:latin typeface="굴림"/>
+                        </a:rPr>
+                        <a:t>▪ 회사명 : </a:t>
+                      </a:r>
+                    </a:p>
+                    <a:p>
+                      <a:r>
+                        <a:rPr sz="1300" b="1">
+                          <a:latin typeface="굴림"/>
+                        </a:rPr>
+                        <a:t>▪ 주소 : </a:t>
+                      </a:r>
+                    </a:p>
+                    <a:p>
+                      <a:r>
+                        <a:rPr sz="1300" b="1">
+                          <a:latin typeface="굴림"/>
+                        </a:rPr>
+                        <a:t>▪ 연락처 : </a:t>
                       </a:r>
                     </a:p>
                   </a:txBody>
@@ -1202,8 +1491,8 @@
         </p:nvSpPr>
         <p:spPr>
           <a:xfrm>
-            <a:off x="189000" y="108000"/>
-            <a:ext cx="6451560" cy="2160000"/>
+            <a:off x="189000" y="150000"/>
+            <a:ext cx="6451560" cy="950000"/>
           </a:xfrm>
           <a:prstGeom prst="rect">
             <a:avLst/>
@@ -1232,168 +1521,6 @@
               <a:t>NC-T30R</a:t>
             </a:r>
           </a:p>
-          <a:p>
-            <a:pPr algn="ctr">
-              <a:lnSpc>
-                <a:spcPct val="90000"/>
-              </a:lnSpc>
-            </a:pPr>
-            <a:r>
-              <a:rPr sz="1200" b="0">
-                <a:latin typeface="HY헤드라인M"/>
-              </a:rPr>
-              <a:t>( CAS No. : 7440-47-3 ,  함유량 : 18~22%) - 크롬</a:t>
-            </a:r>
-          </a:p>
-          <a:p>
-            <a:pPr algn="ctr">
-              <a:lnSpc>
-                <a:spcPct val="90000"/>
-              </a:lnSpc>
-            </a:pPr>
-            <a:r>
-              <a:rPr sz="1200" b="0">
-                <a:latin typeface="HY헤드라인M"/>
-              </a:rPr>
-              <a:t>( CAS No. : 7440-50-8 ,  함유량 : &lt;1%) - 구리</a:t>
-            </a:r>
-          </a:p>
-          <a:p>
-            <a:pPr algn="ctr">
-              <a:lnSpc>
-                <a:spcPct val="90000"/>
-              </a:lnSpc>
-            </a:pPr>
-            <a:r>
-              <a:rPr sz="1200" b="0">
-                <a:latin typeface="HY헤드라인M"/>
-              </a:rPr>
-              <a:t>( CAS No. : 7439-89-6 ,  함유량 : &lt;3%) - 철</a:t>
-            </a:r>
-          </a:p>
-          <a:p>
-            <a:pPr algn="ctr">
-              <a:lnSpc>
-                <a:spcPct val="90000"/>
-              </a:lnSpc>
-            </a:pPr>
-            <a:r>
-              <a:rPr sz="1200" b="0">
-                <a:latin typeface="HY헤드라인M"/>
-              </a:rPr>
-              <a:t>( CAS No. : 7439-96-5 ,  함유량 : 2.5~3.5%) - 망간</a:t>
-            </a:r>
-          </a:p>
-          <a:p>
-            <a:pPr algn="ctr">
-              <a:lnSpc>
-                <a:spcPct val="90000"/>
-              </a:lnSpc>
-            </a:pPr>
-            <a:r>
-              <a:rPr sz="1200" b="0">
-                <a:latin typeface="HY헤드라인M"/>
-              </a:rPr>
-              <a:t>( CAS No. : 7440-03-1 ,  함유량 : 2~3%) - 니오븀</a:t>
-            </a:r>
-          </a:p>
-          <a:p>
-            <a:pPr algn="ctr">
-              <a:lnSpc>
-                <a:spcPct val="90000"/>
-              </a:lnSpc>
-            </a:pPr>
-            <a:r>
-              <a:rPr sz="1200" b="0">
-                <a:latin typeface="HY헤드라인M"/>
-              </a:rPr>
-              <a:t>( CAS No. : 7440-02-0 ,  함유량 : &gt;67%) - 니켈</a:t>
-            </a:r>
-          </a:p>
-          <a:p>
-            <a:pPr algn="ctr">
-              <a:lnSpc>
-                <a:spcPct val="90000"/>
-              </a:lnSpc>
-            </a:pPr>
-            <a:r>
-              <a:rPr sz="1200" b="0">
-                <a:latin typeface="HY헤드라인M"/>
-              </a:rPr>
-              <a:t>( CAS No. : 7440-21-3 ,  함유량 : &lt;1%) - 실리콘</a:t>
-            </a:r>
-          </a:p>
-        </p:txBody>
-      </p:sp>
-      <p:sp>
-        <p:nvSpPr>
-          <p:cNvPr id="8" name="Rectangle 15"/>
-          <p:cNvSpPr/>
-          <p:nvPr/>
-        </p:nvSpPr>
-        <p:spPr>
-          <a:xfrm>
-            <a:off x="5460000" y="3009380"/>
-            <a:ext cx="1224000" cy="600120"/>
-          </a:xfrm>
-          <a:prstGeom prst="rect">
-            <a:avLst/>
-          </a:prstGeom>
-          <a:noFill/>
-          <a:ln w="0">
-            <a:noFill/>
-          </a:ln>
-        </p:spPr>
-        <p:style>
-          <a:lnRef idx="0"/>
-          <a:fillRef idx="0"/>
-          <a:effectRef idx="0"/>
-          <a:fontRef idx="minor"/>
-        </p:style>
-        <p:txBody>
-          <a:bodyPr lIns="90000" rIns="90000" tIns="82800" bIns="46800" anchor="t">
-            <a:normAutofit/>
-          </a:bodyPr>
-          <a:p>
-            <a:pPr marL="431640" indent="-431640" algn="ctr">
-              <a:lnSpc>
-                <a:spcPts val="3600"/>
-              </a:lnSpc>
-              <a:spcBef>
-                <a:spcPts val="901"/>
-              </a:spcBef>
-              <a:tabLst>
-                <a:tab algn="l" pos="0"/>
-                <a:tab algn="l" pos="914400"/>
-                <a:tab algn="l" pos="1828800"/>
-                <a:tab algn="l" pos="2743200"/>
-                <a:tab algn="l" pos="3657600"/>
-                <a:tab algn="l" pos="4572000"/>
-                <a:tab algn="l" pos="5486400"/>
-                <a:tab algn="l" pos="6400800"/>
-                <a:tab algn="l" pos="7315200"/>
-                <a:tab algn="l" pos="8229600"/>
-                <a:tab algn="l" pos="9144000"/>
-                <a:tab algn="l" pos="10058400"/>
-              </a:tabLst>
-            </a:pPr>
-            <a:r>
-              <a:rPr b="1" lang="ko-KR" sz="3600" spc="-1" strike="noStrike">
-                <a:solidFill>
-                  <a:srgbClr val="000000"/>
-                </a:solidFill>
-                <a:latin typeface="HY헤드라인M"/>
-                <a:ea typeface="HY헤드라인M"/>
-              </a:rPr>
-              <a:t>위험</a:t>
-            </a:r>
-            <a:endParaRPr b="0" lang="en-US" sz="3600" spc="-1" strike="noStrike">
-              <a:solidFill>
-                <a:srgbClr val="000000"/>
-              </a:solidFill>
-              <a:latin typeface="굴림"/>
-            </a:endParaRPr>
-          </a:p>
         </p:txBody>
       </p:sp>
       <p:sp>
@@ -1404,7 +1531,7 @@
         </p:nvSpPr>
         <p:spPr>
           <a:xfrm>
-            <a:off x="336600" y="8516880"/>
+            <a:off x="336600" y="7780000"/>
             <a:ext cx="6264360" cy="384120"/>
           </a:xfrm>
           <a:prstGeom prst="rect">
@@ -1430,7 +1557,7 @@
               <a:rPr sz="1200" b="1">
                 <a:latin typeface="굴림"/>
               </a:rPr>
-              <a:t>※ 공급자 정보 : 경상남도 창원시 성산구 정동로 62번길 56(성주동)  ㈜세아에삽 ☎ 055-289-8111</a:t>
+              <a:t>※ 기타 자세한 내용은 물질안전보건자료(MSDS) 참고</a:t>
             </a:r>
           </a:p>
         </p:txBody>
@@ -1451,7 +1578,7 @@
         </p:blipFill>
         <p:spPr>
           <a:xfrm>
-            <a:off x="1504000" y="2734440"/>
+            <a:off x="2166000" y="1450000"/>
             <a:ext cx="1150000" cy="1150000"/>
           </a:xfrm>
           <a:prstGeom prst="rect">
@@ -1475,7 +1602,7 @@
         </p:blipFill>
         <p:spPr>
           <a:xfrm>
-            <a:off x="2854000" y="2734440"/>
+            <a:off x="3466000" y="1450000"/>
             <a:ext cx="1150000" cy="1150000"/>
           </a:xfrm>
           <a:prstGeom prst="rect">
@@ -1499,7 +1626,7 @@
         </p:blipFill>
         <p:spPr>
           <a:xfrm>
-            <a:off x="4204000" y="2734440"/>
+            <a:off x="4766000" y="1450000"/>
             <a:ext cx="1150000" cy="1150000"/>
           </a:xfrm>
           <a:prstGeom prst="rect">

--- a/msds_ppt_generator/templates/label_template.pptx
+++ b/msds_ppt_generator/templates/label_template.pptx
@@ -823,7 +823,7 @@
                           <a:solidFill>
                             <a:srgbClr val="000000"/>
                           </a:solidFill>
-                          <a:latin typeface="HY헤드라인M"/>
+                          <a:latin typeface="굴림"/>
                         </a:rPr>
                         <a:t>위험</a:t>
                       </a:r>
@@ -1517,6 +1517,7 @@
             <a:r>
               <a:rPr sz="2800" b="0">
                 <a:latin typeface="HY헤드라인M"/>
+                <a:ea typeface="HY헤드라인M"/>
               </a:rPr>
               <a:t>NC-T30R</a:t>
             </a:r>
@@ -1554,8 +1555,9 @@
           </a:bodyPr>
           <a:p>
             <a:r>
-              <a:rPr sz="1200" b="1">
-                <a:latin typeface="굴림"/>
+              <a:rPr sz="1900" b="1">
+                <a:latin typeface="돋움"/>
+                <a:ea typeface="돋움"/>
               </a:rPr>
               <a:t>※ 기타 자세한 내용은 물질안전보건자료(MSDS) 참고</a:t>
             </a:r>
